--- a/docs/dimastec/Plano-Demonstracao-Agente-IA-Dimastec-CTO.pptx
+++ b/docs/dimastec/Plano-Demonstracao-Agente-IA-Dimastec-CTO.pptx
@@ -3558,7 +3558,7 @@
                 <a:ea typeface="Calibri" pitchFamily="34" charset="-122"/>
                 <a:cs typeface="Calibri" pitchFamily="34" charset="-120"/>
               </a:rPr>
-              <a:t>Meça hit@1 (doc certo em 1º?), MRR e recall@5 + fidelidade ao contexto (não alucinar).</a:t>
+              <a:t>Meça hit@1 (doc certo em 1º?), MRR e recall@5 + fidelidade ao contexto (não alucinar) e taxa de recusa em perguntas adversariais.</a:t>
             </a:r>
             <a:endParaRPr lang="en-US" sz="1300" dirty="0"/>
           </a:p>
@@ -3704,7 +3704,7 @@
                 <a:ea typeface="Calibri" pitchFamily="34" charset="-122"/>
                 <a:cs typeface="Calibri" pitchFamily="34" charset="-120"/>
               </a:rPr>
-              <a:t>•  Comando de avaliação de RAG com golden set (hit@1/MRR/recall).</a:t>
+              <a:t>•  Comando de avaliação de RAG com golden set (hit@1/MRR/recall + taxa de recusa adversarial), com histórico de execuções.</a:t>
             </a:r>
             <a:endParaRPr lang="en-US" sz="1250" dirty="0"/>
           </a:p>
@@ -3782,7 +3782,7 @@
                 <a:ea typeface="Calibri" pitchFamily="34" charset="-122"/>
                 <a:cs typeface="Calibri" pitchFamily="34" charset="-120"/>
               </a:rPr>
-              <a:t>•  A Dimastec já tem golden set com 23 casos no hub — ponto de partida.</a:t>
+              <a:t>•  Já preparamos um golden set inicial com 23 casos a partir da documentação do hub — ponto de partida a expandir.</a:t>
             </a:r>
             <a:endParaRPr lang="en-US" sz="1250" dirty="0"/>
           </a:p>
@@ -14396,7 +14396,7 @@
                 <a:ea typeface="Calibri" pitchFamily="34" charset="-122"/>
                 <a:cs typeface="Calibri" pitchFamily="34" charset="-120"/>
               </a:rPr>
-              <a:t>•  RAG com embeddings + re-rank opcional e cache semântico.</a:t>
+              <a:t>•  RAG com embeddings + re-rank multilíngue opcional e cache semântico.</a:t>
             </a:r>
             <a:endParaRPr lang="en-US" sz="1250" dirty="0"/>
           </a:p>
@@ -14435,7 +14435,7 @@
                 <a:ea typeface="Calibri" pitchFamily="34" charset="-122"/>
                 <a:cs typeface="Calibri" pitchFamily="34" charset="-120"/>
               </a:rPr>
-              <a:t>•  Limiar de relevância: sem doc relevante, responde sem contexto.</a:t>
+              <a:t>•  Cita a fonte no formato [doc · similaridade · data] com score de confiança; abaixo do limiar, responde “evidência insuficiente”.</a:t>
             </a:r>
             <a:endParaRPr lang="en-US" sz="1250" dirty="0"/>
           </a:p>
